--- a/plans/ppt/TW-SELFSELECT台股買賣自動化系統-W1-講稿版.pptx
+++ b/plans/ppt/TW-SELFSELECT台股買賣自動化系統-W1-講稿版.pptx
@@ -3206,7 +3206,7 @@
           </a:p>
           <a:p>
             <a:r>
-              <a:t>這套系統，是用 Python 搭配 Opencode AI 打造的——簡單說，就是讓電腦幫你看盤、幫你下單、用 Telegram 通知你買賣。</a:t>
+              <a:t>這套系統，是用 Python 搭配 DSH AI 打造的——簡單說，就是讓電腦幫你看盤、幫你下單、用 Telegram 通知你買賣。</a:t>
             </a:r>
           </a:p>
           <a:p>
@@ -3319,7 +3319,7 @@
           </a:p>
           <a:p>
             <a:r>
-              <a:t>我問 Opencode：我預期某檔股票——我們姑且叫它 XX——股價還會上升，該用什麼策略？</a:t>
+              <a:t>我問 DSH：我預期某檔股票——我們姑且叫它 XX——股價還會上升，該用什麼策略？</a:t>
             </a:r>
           </a:p>
           <a:p>
@@ -3436,7 +3436,7 @@
           </a:p>
           <a:p>
             <a:r>
-              <a:t>最後我要強調兩件事：第一，這是在 Opencode 中的 AI 問答，不是一般對話型 AI——Opencode 會先掃描專案內所有檔案，才能針對這個專案回答；第二，AI 說的不全對，但是很有參考價值。這是我們面對 AI 建議該有的心態。</a:t>
+              <a:t>最後我要強調兩件事：第一，這是在 DSH 中的 AI 問答，不是一般對話型 AI——DSH 會先掃描專案內所有檔案，才能針對這個專案回答；第二，AI 說的不全對，但是很有參考價值。這是我們面對 AI 建議該有的心態。</a:t>
             </a:r>
           </a:p>
           <a:p>
@@ -3533,7 +3533,7 @@
           </a:p>
           <a:p>
             <a:r>
-              <a:t>第二，申請 OpenRouter 帳戶，先儲值個 20 美金，用完再加——這是用來呼叫 AI 的，另外申請 Nvidia 帳號備用；</a:t>
+              <a:t>第二，AI 服務：本課程使用 DSH（DeepSeek Harness）＋deepseek-flash，金鑰事先設好，不需要另外申請；</a:t>
             </a:r>
           </a:p>
           <a:p>
@@ -3549,11 +3549,6 @@
           <a:p>
             <a:r>
               <a:t>第五，在你的電腦上安裝 VSCode，記得裝 WSL 和 Markdown All in One 插件，然後在 CMD 底下執行 wsl --install 安裝 WSL。手機上要裝 Telegram，並申請 Bot Token。</a:t>
-            </a:r>
-          </a:p>
-          <a:p>
-            <a:r>
-              <a:t>---</a:t>
             </a:r>
           </a:p>
           <a:p/>
@@ -4145,7 +4140,7 @@
           </a:p>
           <a:p>
             <a:r>
-              <a:t>今天的內容包括：簡單認識我、系統簡介、什麼是 Python、什麼是 Opencode，接著會介紹系統內建的五大策略、怎麼回測、最後是實盤執行。</a:t>
+              <a:t>今天的內容包括：簡單認識我、系統簡介、什麼是 Python、什麼是 DSH，接著會介紹系統內建的五大策略、怎麼回測、最後是實盤執行。</a:t>
             </a:r>
           </a:p>
           <a:p>
@@ -4481,7 +4476,7 @@
           </a:p>
           <a:p>
             <a:r>
-              <a:t>最後，我們會給你一份完整的 WSL 壓縮檔，所有 Python、Opencode 等工具都已經安裝好了，打開就能用。</a:t>
+              <a:t>最後，我們會給你一份完整的 WSL 壓縮檔，所有 Python、DSH 等工具都已經安裝好了，打開就能用。</a:t>
             </a:r>
           </a:p>
           <a:p>
@@ -4777,12 +4772,12 @@
           <a:p/>
           <a:p>
             <a:r>
-              <a:t>在進入正題之前，我先給大家看兩個例子，讓你們感受一下「Opencode 加上 Finmind」到底能做到什麼程度。</a:t>
-            </a:r>
-          </a:p>
-          <a:p>
-            <a:r>
-              <a:t>我請 Opencode 幫我做一個「台灣 2026 年前十大 EPS 公司走勢」的 HTML 網頁。</a:t>
+              <a:t>在進入正題之前，我先給大家看兩個例子，讓你們感受一下「DSH 加上 Finmind」到底能做到什麼程度。</a:t>
+            </a:r>
+          </a:p>
+          <a:p>
+            <a:r>
+              <a:t>我請 DSH 幫我做一個「台灣 2026 年前十大 EPS 公司走勢」的 HTML 網頁。</a:t>
             </a:r>
           </a:p>
           <a:p>
@@ -4900,7 +4895,7 @@
           <a:p/>
           <a:p>
             <a:r>
-              <a:t>【講師提示】強調「複合條件一句話完成」，這是 Opencode 工作流的精髓預告。</a:t>
+              <a:t>【講師提示】強調「複合條件一句話完成」，這是 DSH 工作流的精髓預告。</a:t>
             </a:r>
           </a:p>
         </p:txBody>
@@ -12680,23 +12675,23 @@
           <a:p>
             <a:r>
               <a:rPr lang="zh-TW" altLang="en-US" dirty="0"/>
-              <a:t>使用</a:t>
+              <a:t>使用 Python 與 DSH</a:t>
             </a:r>
             <a:r>
               <a:rPr lang="en-US" altLang="zh-TW" dirty="0"/>
-              <a:t>Python</a:t>
+              <a:t/>
             </a:r>
             <a:r>
               <a:rPr lang="zh-TW" altLang="en-US" dirty="0"/>
-              <a:t>與</a:t>
+              <a:t/>
             </a:r>
             <a:r>
               <a:rPr lang="en-US" altLang="zh-TW" dirty="0" err="1"/>
-              <a:t>Opencode</a:t>
+              <a:t/>
             </a:r>
             <a:r>
               <a:rPr lang="en-US" altLang="zh-TW" dirty="0"/>
-              <a:t> AI</a:t>
+              <a:t/>
             </a:r>
             <a:endParaRPr lang="en-US" dirty="0"/>
           </a:p>
@@ -12760,27 +12755,27 @@
           <a:p>
             <a:r>
               <a:rPr lang="zh-TW" altLang="en-US" dirty="0"/>
-              <a:t>與</a:t>
+              <a:t>deepseek-flash</a:t>
             </a:r>
             <a:r>
               <a:rPr lang="en-US" altLang="zh-TW" dirty="0"/>
-              <a:t>AI(</a:t>
+              <a:t/>
             </a:r>
             <a:r>
               <a:rPr lang="en-US" altLang="zh-TW" dirty="0" err="1"/>
-              <a:t>Deepseek</a:t>
+              <a:t/>
             </a:r>
             <a:r>
               <a:rPr lang="en-US" altLang="zh-TW" dirty="0"/>
-              <a:t> R4 Flash)</a:t>
+              <a:t/>
             </a:r>
             <a:r>
               <a:rPr lang="zh-TW" altLang="en-US" dirty="0"/>
-              <a:t>討論策略</a:t>
+              <a:t/>
             </a:r>
             <a:r>
               <a:rPr lang="en-US" altLang="zh-TW" dirty="0"/>
-              <a:t>-1</a:t>
+              <a:t/>
             </a:r>
             <a:endParaRPr lang="en-US" dirty="0"/>
           </a:p>
@@ -13128,27 +13123,27 @@
           <a:p>
             <a:r>
               <a:rPr lang="zh-TW" altLang="en-US" dirty="0"/>
-              <a:t>與</a:t>
+              <a:t>deepseek-flash</a:t>
             </a:r>
             <a:r>
               <a:rPr lang="en-US" altLang="zh-TW" dirty="0"/>
-              <a:t>AI(</a:t>
+              <a:t/>
             </a:r>
             <a:r>
               <a:rPr lang="en-US" altLang="zh-TW" dirty="0" err="1"/>
-              <a:t>Deepseek</a:t>
+              <a:t/>
             </a:r>
             <a:r>
               <a:rPr lang="en-US" altLang="zh-TW" dirty="0"/>
-              <a:t> R4 Flash)</a:t>
+              <a:t/>
             </a:r>
             <a:r>
               <a:rPr lang="zh-TW" altLang="en-US" dirty="0"/>
-              <a:t>討論策略</a:t>
+              <a:t/>
             </a:r>
             <a:r>
               <a:rPr lang="en-US" altLang="zh-TW" dirty="0"/>
-              <a:t>-2</a:t>
+              <a:t/>
             </a:r>
             <a:endParaRPr lang="en-US" dirty="0"/>
           </a:p>
@@ -13433,7 +13428,7 @@
                   <a:srgbClr val="FF0000"/>
                 </a:solidFill>
               </a:rPr>
-              <a:t>Opencode</a:t>
+              <a:t>DSH</a:t>
             </a:r>
             <a:r>
               <a:rPr lang="zh-TW" altLang="en-US" b="1" dirty="0">
@@ -13513,7 +13508,7 @@
                   <a:srgbClr val="FF0000"/>
                 </a:solidFill>
               </a:rPr>
-              <a:t>Opencode</a:t>
+              <a:t>DSH</a:t>
             </a:r>
             <a:r>
               <a:rPr lang="zh-TW" altLang="en-US" b="1" dirty="0">
@@ -13902,61 +13897,61 @@
                         <a:rPr lang="en-US" sz="3300" dirty="0" err="1">
                           <a:hlinkClick r:id="rId3"/>
                         </a:rPr>
-                        <a:t>Openrouter</a:t>
+                        <a:t>（本課程統一用 DeepSeek 官方模型，避免金鑰與計費混亂）</a:t>
                       </a:r>
                       <a:r>
                         <a:rPr lang="zh-TW" altLang="en-US" sz="3300" dirty="0"/>
-                        <a:t>帳戶</a:t>
+                        <a:t/>
                       </a:r>
                       <a:r>
                         <a:rPr lang="en-US" altLang="zh-TW" sz="3300" dirty="0"/>
-                        <a:t>(</a:t>
+                        <a:t/>
                       </a:r>
                       <a:r>
                         <a:rPr lang="zh-TW" altLang="en-US" sz="3300" dirty="0"/>
-                        <a:t>並充個</a:t>
+                        <a:t/>
                       </a:r>
                       <a:r>
                         <a:rPr lang="en-US" altLang="zh-TW" sz="3300" dirty="0"/>
-                        <a:t>20</a:t>
+                        <a:t/>
                       </a:r>
                       <a:r>
                         <a:rPr lang="zh-TW" altLang="en-US" sz="3300" dirty="0"/>
-                        <a:t>美金</a:t>
+                        <a:t/>
                       </a:r>
                       <a:r>
                         <a:rPr lang="en-US" altLang="zh-TW" sz="3300" dirty="0"/>
-                        <a:t>,</a:t>
+                        <a:t/>
                       </a:r>
                       <a:r>
                         <a:rPr lang="zh-TW" altLang="en-US" sz="3300" dirty="0"/>
-                        <a:t>用完再加</a:t>
+                        <a:t/>
                       </a:r>
                       <a:r>
                         <a:rPr lang="en-US" altLang="zh-TW" sz="3300" dirty="0"/>
-                        <a:t>)</a:t>
+                        <a:t/>
                       </a:r>
                       <a:r>
                         <a:rPr lang="zh-TW" altLang="en-US" sz="3300" dirty="0"/>
-                        <a:t>以使用</a:t>
+                        <a:t/>
                       </a:r>
                       <a:r>
                         <a:rPr lang="en-US" altLang="zh-TW" sz="3300" dirty="0"/>
-                        <a:t>AI,</a:t>
+                        <a:t/>
                       </a:r>
                       <a:r>
                         <a:rPr lang="zh-TW" altLang="en-US" sz="3300" dirty="0"/>
-                        <a:t> 並申請</a:t>
+                        <a:t/>
                       </a:r>
                       <a:r>
                         <a:rPr lang="en-US" altLang="zh-TW" sz="3300" dirty="0">
                           <a:hlinkClick r:id="rId4"/>
                         </a:rPr>
-                        <a:t>Nvidia</a:t>
+                        <a:t/>
                       </a:r>
                       <a:r>
                         <a:rPr lang="zh-TW" altLang="en-US" sz="3300" dirty="0"/>
-                        <a:t>帳號備用</a:t>
+                        <a:t/>
                       </a:r>
                       <a:endParaRPr lang="en-US" sz="3300" dirty="0"/>
                     </a:p>
@@ -16758,11 +16753,11 @@
           <a:p>
             <a:r>
               <a:rPr lang="zh-TW" altLang="en-US" dirty="0"/>
-              <a:t>關於</a:t>
+              <a:t>關於 DSH</a:t>
             </a:r>
             <a:r>
               <a:rPr lang="en-US" altLang="zh-TW" dirty="0" err="1"/>
-              <a:t>Opencode</a:t>
+              <a:t/>
             </a:r>
             <a:endParaRPr lang="en-US" dirty="0"/>
           </a:p>
@@ -17645,7 +17640,7 @@
             </a:r>
             <a:r>
               <a:rPr lang="en-US" altLang="zh-TW" dirty="0" err="1"/>
-              <a:t>Opencode</a:t>
+              <a:t>DSH</a:t>
             </a:r>
             <a:r>
               <a:rPr lang="en-US" altLang="zh-TW" dirty="0"/>
@@ -18266,7 +18261,7 @@
           <a:p>
             <a:r>
               <a:rPr lang="en-US" altLang="zh-TW" dirty="0" err="1"/>
-              <a:t>Opencode+Finmind</a:t>
+              <a:t>DSH + Finmind</a:t>
             </a:r>
             <a:r>
               <a:rPr lang="zh-TW" altLang="en-US" dirty="0"/>
@@ -18512,7 +18507,7 @@
           <a:p>
             <a:r>
               <a:rPr lang="en-US" altLang="zh-TW" dirty="0" err="1"/>
-              <a:t>Opencode+Finmind</a:t>
+              <a:t>DSH + Finmind</a:t>
             </a:r>
             <a:r>
               <a:rPr lang="zh-TW" altLang="en-US" dirty="0"/>

--- a/plans/ppt/TW-SELFSELECT台股買賣自動化系統-W1-講稿版.pptx
+++ b/plans/ppt/TW-SELFSELECT台股買賣自動化系統-W1-講稿版.pptx
@@ -3727,7 +3727,7 @@
           </a:p>
           <a:p>
             <a:r>
-              <a:t>這台機器我們取名為 tw-autotrader，規格是：位置在 asia-east1-b，也就是台灣彰濱工業區的機房，對台灣使用者來說連線速度最快；機型是 e2-micro，一核心 vCPU、1GB 記憶體；作業系統用 ubuntu-2204-jammy。</a:t>
+              <a:t>這台機器我們取名為 tw-selfselect（名稱可自取；本機 .env 的 SYNC_VM_NAME 要填同名），規格是：位置在 asia-east1-b，也就是台灣彰濱工業區的機房，對台灣使用者來說連線速度最快；機型是 e2-micro，一核心 vCPU、1GB 記憶體；作業系統用 ubuntu-2204-jammy。</a:t>
             </a:r>
           </a:p>
           <a:p>
@@ -3839,7 +3839,7 @@
           </a:p>
           <a:p>
             <a:r>
-              <a:t>接著點「建立執行個體」，照著規格設定：名稱輸入 tw-autotrader；區域選 asia-east1，可用區選 asia-east1-b；機器組態選 E2 系列、e2-micro 類型；開機磁碟點「變更」，作業系統選 Ubuntu、版本選 22.04 LTS。</a:t>
+              <a:t>接著點「建立執行個體」，照著規格設定：名稱輸入 tw-selfselect（可自取，需與 .env 的 SYNC_VM_NAME 一致）；區域選 asia-east1，可用區選 asia-east1-b；機器組態選 E2 系列、e2-micro 類型；開機磁碟點「變更」，作業系統選 Ubuntu、版本選 22.04 LTS。</a:t>
             </a:r>
           </a:p>
           <a:p>
@@ -3946,7 +3946,7 @@
           </a:p>
           <a:p>
             <a:r>
-              <a:t>步驟如下：進到 GCP 控制台，點導覽選單，找到「VPC 網路」裡的「IP 位址」。你會看到一筆分配給 tw-autotrader 的 IP，類型顯示「外網／暫時」。點右側的三個點，選「保留靜態外部 IP 位址」，取個名字，比如 tw-autotrader-static-ip，然後點「保留」。</a:t>
+              <a:t>步驟如下：進到 GCP 控制台，點導覽選單，找到「VPC 網路」裡的「IP 位址」。你會看到一筆分配給 tw-selfselect 的 IP，類型顯示「外網／暫時」。點右側的三個點，選「保留靜態外部 IP 位址」，取個名字，比如 tw-selfselect-static-ip，然後點「保留」。</a:t>
             </a:r>
           </a:p>
           <a:p>
@@ -4242,7 +4242,7 @@
           </a:p>
           <a:p>
             <a:r>
-              <a:t>這套 tw-autotrader 台股買賣自動化系統，是我開源放在 GitHub 上的專案——意思是所有原始碼都公開，你隨時可以上網看、可以學、可以改。</a:t>
+              <a:t>這套 tw-selfselect 台股買賣自動化系統，是我開源放在 GitHub 上的專案——意思是所有原始碼都公開，你隨時可以上網看、可以學、可以改。</a:t>
             </a:r>
           </a:p>
           <a:p>
@@ -4680,7 +4680,7 @@
           </a:p>
           <a:p>
             <a:r>
-              <a:t>這是系統的實際運行展示頁面，網址在這裡——dinchentech.github.io/tw-autotrader。</a:t>
+              <a:t>這是系統的實際運行展示頁面，網址在這裡——這是母專案（tw-autotrader）的示範儀表板：dinchentech.github.io/tw-autotrader。</a:t>
             </a:r>
           </a:p>
           <a:p>
@@ -14752,550 +14752,29 @@
               <a:defRPr/>
             </a:pPr>
             <a:r>
-              <a:rPr lang="zh-TW" altLang="en-US" dirty="0"/>
-              <a:t>怎樣申請</a:t>
-            </a:r>
-            <a:r>
-              <a:rPr lang="en-US" altLang="zh-TW" dirty="0" err="1"/>
-              <a:t>Gcloud</a:t>
-            </a:r>
-            <a:r>
-              <a:rPr lang="zh-TW" altLang="en-US" dirty="0"/>
-              <a:t>雲端主機</a:t>
-            </a:r>
-            <a:r>
-              <a:rPr lang="en-US" altLang="zh-TW" dirty="0"/>
-              <a:t>-1</a:t>
-            </a:r>
-            <a:br>
-              <a:rPr lang="en-US" altLang="zh-TW" dirty="0"/>
-            </a:br>
-            <a:r>
-              <a:rPr kumimoji="0" lang="zh-TW" altLang="zh-TW" sz="1800" b="0" i="0" u="none" strike="noStrike" kern="1200" cap="none" spc="0" normalizeH="0" baseline="0" noProof="0" dirty="0">
-                <a:ln>
-                  <a:noFill/>
-                </a:ln>
-                <a:solidFill>
-                  <a:prstClr val="black">
-                    <a:lumMod val="85000"/>
-                    <a:lumOff val="15000"/>
-                  </a:prstClr>
-                </a:solidFill>
-                <a:effectLst/>
-                <a:uLnTx/>
-                <a:uFillTx/>
-                <a:latin typeface="Century Gothic"/>
-              </a:rPr>
-              <a:t>名稱為 tw-</a:t>
-            </a:r>
-            <a:r>
-              <a:rPr kumimoji="0" lang="en-US" altLang="zh-TW" sz="1800" b="0" i="0" u="none" strike="noStrike" kern="1200" cap="none" spc="0" normalizeH="0" baseline="0" noProof="0" dirty="0">
-                <a:ln>
-                  <a:noFill/>
-                </a:ln>
-                <a:solidFill>
-                  <a:prstClr val="black">
-                    <a:lumMod val="85000"/>
-                    <a:lumOff val="15000"/>
-                  </a:prstClr>
-                </a:solidFill>
-                <a:effectLst/>
-                <a:uLnTx/>
-                <a:uFillTx/>
-                <a:latin typeface="Century Gothic"/>
-              </a:rPr>
-              <a:t>A</a:t>
-            </a:r>
-            <a:r>
-              <a:rPr kumimoji="0" lang="zh-TW" altLang="zh-TW" sz="1800" b="0" i="0" u="none" strike="noStrike" kern="1200" cap="none" spc="0" normalizeH="0" baseline="0" noProof="0" dirty="0">
-                <a:ln>
-                  <a:noFill/>
-                </a:ln>
-                <a:solidFill>
-                  <a:prstClr val="black">
-                    <a:lumMod val="85000"/>
-                    <a:lumOff val="15000"/>
-                  </a:prstClr>
-                </a:solidFill>
-                <a:effectLst/>
-                <a:uLnTx/>
-                <a:uFillTx/>
-                <a:latin typeface="Century Gothic"/>
-              </a:rPr>
-              <a:t>utotrader</a:t>
-            </a:r>
-            <a:r>
-              <a:rPr kumimoji="0" lang="en-US" altLang="zh-TW" sz="1800" b="0" i="0" u="none" strike="noStrike" kern="1200" cap="none" spc="0" normalizeH="0" baseline="0" noProof="0" dirty="0">
-                <a:ln>
-                  <a:noFill/>
-                </a:ln>
-                <a:solidFill>
-                  <a:prstClr val="black">
-                    <a:lumMod val="85000"/>
-                    <a:lumOff val="15000"/>
-                  </a:prstClr>
-                </a:solidFill>
-                <a:effectLst/>
-                <a:uLnTx/>
-                <a:uFillTx/>
-                <a:latin typeface="Century Gothic"/>
-              </a:rPr>
-              <a:t>(</a:t>
-            </a:r>
-            <a:r>
-              <a:rPr kumimoji="0" lang="zh-TW" altLang="en-US" sz="1800" b="0" i="0" u="none" strike="noStrike" kern="1200" cap="none" spc="0" normalizeH="0" baseline="0" noProof="0" dirty="0">
-                <a:ln>
-                  <a:noFill/>
-                </a:ln>
-                <a:solidFill>
-                  <a:prstClr val="black">
-                    <a:lumMod val="85000"/>
-                    <a:lumOff val="15000"/>
-                  </a:prstClr>
-                </a:solidFill>
-                <a:effectLst/>
-                <a:uLnTx/>
-                <a:uFillTx/>
-                <a:latin typeface="Century Gothic"/>
-              </a:rPr>
-              <a:t>使用者自定</a:t>
-            </a:r>
-            <a:r>
-              <a:rPr kumimoji="0" lang="en-US" altLang="zh-TW" sz="1800" b="0" i="0" u="none" strike="noStrike" kern="1200" cap="none" spc="0" normalizeH="0" baseline="0" noProof="0" dirty="0">
-                <a:ln>
-                  <a:noFill/>
-                </a:ln>
-                <a:solidFill>
-                  <a:prstClr val="black">
-                    <a:lumMod val="85000"/>
-                    <a:lumOff val="15000"/>
-                  </a:prstClr>
-                </a:solidFill>
-                <a:effectLst/>
-                <a:uLnTx/>
-                <a:uFillTx/>
-                <a:latin typeface="Century Gothic"/>
-              </a:rPr>
-              <a:t>)</a:t>
-            </a:r>
-            <a:r>
-              <a:rPr kumimoji="0" lang="zh-TW" altLang="zh-TW" sz="1800" b="0" i="0" u="none" strike="noStrike" kern="1200" cap="none" spc="0" normalizeH="0" baseline="0" noProof="0" dirty="0">
-                <a:ln>
-                  <a:noFill/>
-                </a:ln>
-                <a:solidFill>
-                  <a:prstClr val="black">
-                    <a:lumMod val="85000"/>
-                    <a:lumOff val="15000"/>
-                  </a:prstClr>
-                </a:solidFill>
-                <a:effectLst/>
-                <a:uLnTx/>
-                <a:uFillTx/>
-                <a:latin typeface="Century Gothic"/>
-              </a:rPr>
-              <a:t> 的 </a:t>
-            </a:r>
-            <a:r>
-              <a:rPr kumimoji="0" lang="zh-TW" altLang="zh-TW" sz="1800" b="1" i="0" u="none" strike="noStrike" kern="1200" cap="none" spc="0" normalizeH="0" baseline="0" noProof="0" dirty="0">
-                <a:ln>
-                  <a:noFill/>
-                </a:ln>
-                <a:solidFill>
-                  <a:prstClr val="black">
-                    <a:lumMod val="85000"/>
-                    <a:lumOff val="15000"/>
-                  </a:prstClr>
-                </a:solidFill>
-                <a:effectLst/>
-                <a:uLnTx/>
-                <a:uFillTx/>
-                <a:latin typeface="Century Gothic"/>
-              </a:rPr>
-              <a:t>VM 虛擬機器（Virtual Machine）</a:t>
-            </a:r>
-            <a:r>
-              <a:rPr kumimoji="0" lang="zh-TW" altLang="zh-TW" sz="1800" b="0" i="0" u="none" strike="noStrike" kern="1200" cap="none" spc="0" normalizeH="0" baseline="0" noProof="0" dirty="0">
-                <a:ln>
-                  <a:noFill/>
-                </a:ln>
-                <a:solidFill>
-                  <a:prstClr val="black">
-                    <a:lumMod val="85000"/>
-                    <a:lumOff val="15000"/>
-                  </a:prstClr>
-                </a:solidFill>
-                <a:effectLst/>
-                <a:uLnTx/>
-                <a:uFillTx/>
-                <a:latin typeface="Century Gothic"/>
-              </a:rPr>
-              <a:t>。 </a:t>
-            </a:r>
-            <a:br>
-              <a:rPr kumimoji="0" lang="zh-TW" altLang="zh-TW" sz="1800" b="0" i="0" u="none" strike="noStrike" kern="1200" cap="none" spc="0" normalizeH="0" baseline="0" noProof="0" dirty="0">
-                <a:ln>
-                  <a:noFill/>
-                </a:ln>
-                <a:solidFill>
-                  <a:prstClr val="black">
-                    <a:lumMod val="85000"/>
-                    <a:lumOff val="15000"/>
-                  </a:prstClr>
-                </a:solidFill>
-                <a:effectLst/>
-                <a:uLnTx/>
-                <a:uFillTx/>
-                <a:latin typeface="Century Gothic"/>
-              </a:rPr>
-            </a:br>
-            <a:r>
-              <a:rPr kumimoji="0" lang="zh-TW" altLang="zh-TW" sz="1800" b="0" i="0" u="none" strike="noStrike" kern="1200" cap="none" spc="0" normalizeH="0" baseline="0" noProof="0" dirty="0">
-                <a:ln>
-                  <a:noFill/>
-                </a:ln>
-                <a:solidFill>
-                  <a:prstClr val="black">
-                    <a:lumMod val="85000"/>
-                    <a:lumOff val="15000"/>
-                  </a:prstClr>
-                </a:solidFill>
-                <a:effectLst/>
-                <a:uLnTx/>
-                <a:uFillTx/>
-                <a:latin typeface="Century Gothic"/>
-              </a:rPr>
+              <a:t>怎樣申請Gcloud雲端主機-1</a:t>
+            </a:r>
+            <a:br/>
+            <a:r>
+              <a:t>名稱為 tw-selfselect（可自取）的 VM 虛擬機器（Virtual Machine）。 </a:t>
+            </a:r>
+            <a:br/>
+            <a:r>
               <a:t>這台機器的規格和特點如下：</a:t>
             </a:r>
-            <a:br>
-              <a:rPr kumimoji="0" lang="zh-TW" altLang="zh-TW" sz="1800" b="0" i="0" u="none" strike="noStrike" kern="1200" cap="none" spc="0" normalizeH="0" baseline="0" noProof="0" dirty="0">
-                <a:ln>
-                  <a:noFill/>
-                </a:ln>
-                <a:solidFill>
-                  <a:prstClr val="black">
-                    <a:lumMod val="85000"/>
-                    <a:lumOff val="15000"/>
-                  </a:prstClr>
-                </a:solidFill>
-                <a:effectLst/>
-                <a:uLnTx/>
-                <a:uFillTx/>
-                <a:latin typeface="Century Gothic"/>
-              </a:rPr>
-            </a:br>
-            <a:r>
-              <a:rPr kumimoji="0" lang="zh-TW" altLang="zh-TW" sz="1800" b="1" i="0" u="none" strike="noStrike" kern="1200" cap="none" spc="0" normalizeH="0" baseline="0" noProof="0" dirty="0">
-                <a:ln>
-                  <a:noFill/>
-                </a:ln>
-                <a:solidFill>
-                  <a:prstClr val="black">
-                    <a:lumMod val="85000"/>
-                    <a:lumOff val="15000"/>
-                  </a:prstClr>
-                </a:solidFill>
-                <a:effectLst/>
-                <a:uLnTx/>
-                <a:uFillTx/>
-                <a:latin typeface="Century Gothic"/>
-              </a:rPr>
-              <a:t>位置</a:t>
-            </a:r>
-            <a:r>
-              <a:rPr kumimoji="0" lang="zh-TW" altLang="zh-TW" sz="1800" b="0" i="0" u="none" strike="noStrike" kern="1200" cap="none" spc="0" normalizeH="0" baseline="0" noProof="0" dirty="0">
-                <a:ln>
-                  <a:noFill/>
-                </a:ln>
-                <a:solidFill>
-                  <a:prstClr val="black">
-                    <a:lumMod val="85000"/>
-                    <a:lumOff val="15000"/>
-                  </a:prstClr>
-                </a:solidFill>
-                <a:effectLst/>
-                <a:uLnTx/>
-                <a:uFillTx/>
-                <a:latin typeface="Century Gothic"/>
-              </a:rPr>
-              <a:t>：</a:t>
-            </a:r>
-            <a:r>
-              <a:rPr kumimoji="0" lang="zh-TW" altLang="zh-TW" sz="1800" b="0" i="0" u="none" strike="noStrike" kern="1200" cap="none" spc="0" normalizeH="0" baseline="0" noProof="0" dirty="0">
-                <a:ln>
-                  <a:noFill/>
-                </a:ln>
-                <a:solidFill>
-                  <a:prstClr val="black">
-                    <a:lumMod val="85000"/>
-                    <a:lumOff val="15000"/>
-                  </a:prstClr>
-                </a:solidFill>
-                <a:effectLst/>
-                <a:highlight>
-                  <a:srgbClr val="FFFF00"/>
-                </a:highlight>
-                <a:uLnTx/>
-                <a:uFillTx/>
-                <a:latin typeface="Century Gothic"/>
-              </a:rPr>
-              <a:t>asia-east1-b</a:t>
-            </a:r>
-            <a:r>
-              <a:rPr kumimoji="0" lang="zh-TW" altLang="zh-TW" sz="1800" b="0" i="0" u="none" strike="noStrike" kern="1200" cap="none" spc="0" normalizeH="0" baseline="0" noProof="0" dirty="0">
-                <a:ln>
-                  <a:noFill/>
-                </a:ln>
-                <a:solidFill>
-                  <a:prstClr val="black">
-                    <a:lumMod val="85000"/>
-                    <a:lumOff val="15000"/>
-                  </a:prstClr>
-                </a:solidFill>
-                <a:effectLst/>
-                <a:uLnTx/>
-                <a:uFillTx/>
-                <a:latin typeface="Century Gothic"/>
-              </a:rPr>
-              <a:t>（位於</a:t>
-            </a:r>
-            <a:r>
-              <a:rPr kumimoji="0" lang="zh-TW" altLang="zh-TW" sz="1800" b="1" i="0" u="none" strike="noStrike" kern="1200" cap="none" spc="0" normalizeH="0" baseline="0" noProof="0" dirty="0">
-                <a:ln>
-                  <a:noFill/>
-                </a:ln>
-                <a:solidFill>
-                  <a:prstClr val="black">
-                    <a:lumMod val="85000"/>
-                    <a:lumOff val="15000"/>
-                  </a:prstClr>
-                </a:solidFill>
-                <a:effectLst/>
-                <a:uLnTx/>
-                <a:uFillTx/>
-                <a:latin typeface="Century Gothic"/>
-              </a:rPr>
-              <a:t>台灣彰濱工業區</a:t>
-            </a:r>
-            <a:r>
-              <a:rPr kumimoji="0" lang="zh-TW" altLang="zh-TW" sz="1800" b="0" i="0" u="none" strike="noStrike" kern="1200" cap="none" spc="0" normalizeH="0" baseline="0" noProof="0" dirty="0">
-                <a:ln>
-                  <a:noFill/>
-                </a:ln>
-                <a:solidFill>
-                  <a:prstClr val="black">
-                    <a:lumMod val="85000"/>
-                    <a:lumOff val="15000"/>
-                  </a:prstClr>
-                </a:solidFill>
-                <a:effectLst/>
-                <a:uLnTx/>
-                <a:uFillTx/>
-                <a:latin typeface="Century Gothic"/>
-              </a:rPr>
-              <a:t>的機房，對台灣使用者而言連線速度最快）。</a:t>
-            </a:r>
-            <a:br>
-              <a:rPr kumimoji="0" lang="zh-TW" altLang="zh-TW" sz="1800" b="0" i="0" u="none" strike="noStrike" kern="1200" cap="none" spc="0" normalizeH="0" baseline="0" noProof="0" dirty="0">
-                <a:ln>
-                  <a:noFill/>
-                </a:ln>
-                <a:solidFill>
-                  <a:prstClr val="black">
-                    <a:lumMod val="85000"/>
-                    <a:lumOff val="15000"/>
-                  </a:prstClr>
-                </a:solidFill>
-                <a:effectLst/>
-                <a:uLnTx/>
-                <a:uFillTx/>
-                <a:latin typeface="Century Gothic"/>
-              </a:rPr>
-            </a:br>
-            <a:r>
-              <a:rPr kumimoji="0" lang="zh-TW" altLang="zh-TW" sz="1800" b="1" i="0" u="none" strike="noStrike" kern="1200" cap="none" spc="0" normalizeH="0" baseline="0" noProof="0" dirty="0">
-                <a:ln>
-                  <a:noFill/>
-                </a:ln>
-                <a:solidFill>
-                  <a:prstClr val="black">
-                    <a:lumMod val="85000"/>
-                    <a:lumOff val="15000"/>
-                  </a:prstClr>
-                </a:solidFill>
-                <a:effectLst/>
-                <a:uLnTx/>
-                <a:uFillTx/>
-                <a:latin typeface="Century Gothic"/>
-              </a:rPr>
-              <a:t>機型</a:t>
-            </a:r>
-            <a:r>
-              <a:rPr kumimoji="0" lang="zh-TW" altLang="zh-TW" sz="1800" b="0" i="0" u="none" strike="noStrike" kern="1200" cap="none" spc="0" normalizeH="0" baseline="0" noProof="0" dirty="0">
-                <a:ln>
-                  <a:noFill/>
-                </a:ln>
-                <a:solidFill>
-                  <a:prstClr val="black">
-                    <a:lumMod val="85000"/>
-                    <a:lumOff val="15000"/>
-                  </a:prstClr>
-                </a:solidFill>
-                <a:effectLst/>
-                <a:uLnTx/>
-                <a:uFillTx/>
-                <a:latin typeface="Century Gothic"/>
-              </a:rPr>
-              <a:t>：</a:t>
-            </a:r>
-            <a:r>
-              <a:rPr kumimoji="0" lang="zh-TW" altLang="zh-TW" sz="1800" b="0" i="0" u="none" strike="noStrike" kern="1200" cap="none" spc="0" normalizeH="0" baseline="0" noProof="0" dirty="0">
-                <a:ln>
-                  <a:noFill/>
-                </a:ln>
-                <a:solidFill>
-                  <a:prstClr val="black">
-                    <a:lumMod val="85000"/>
-                    <a:lumOff val="15000"/>
-                  </a:prstClr>
-                </a:solidFill>
-                <a:effectLst/>
-                <a:highlight>
-                  <a:srgbClr val="FFFF00"/>
-                </a:highlight>
-                <a:uLnTx/>
-                <a:uFillTx/>
-                <a:latin typeface="Century Gothic"/>
-              </a:rPr>
-              <a:t>e2-micro</a:t>
-            </a:r>
-            <a:r>
-              <a:rPr kumimoji="0" lang="zh-TW" altLang="zh-TW" sz="1800" b="0" i="0" u="none" strike="noStrike" kern="1200" cap="none" spc="0" normalizeH="0" baseline="0" noProof="0" dirty="0">
-                <a:ln>
-                  <a:noFill/>
-                </a:ln>
-                <a:solidFill>
-                  <a:prstClr val="black">
-                    <a:lumMod val="85000"/>
-                    <a:lumOff val="15000"/>
-                  </a:prstClr>
-                </a:solidFill>
-                <a:effectLst/>
-                <a:uLnTx/>
-                <a:uFillTx/>
-                <a:latin typeface="Century Gothic"/>
-              </a:rPr>
-              <a:t>（配備 1 核心 vCPU、1 GB 記憶體），這是 Google 提供給新用戶或特定區域的輕量級機型。</a:t>
-            </a:r>
-            <a:br>
-              <a:rPr kumimoji="0" lang="zh-TW" altLang="zh-TW" sz="1800" b="0" i="0" u="none" strike="noStrike" kern="1200" cap="none" spc="0" normalizeH="0" baseline="0" noProof="0" dirty="0">
-                <a:ln>
-                  <a:noFill/>
-                </a:ln>
-                <a:solidFill>
-                  <a:prstClr val="black">
-                    <a:lumMod val="85000"/>
-                    <a:lumOff val="15000"/>
-                  </a:prstClr>
-                </a:solidFill>
-                <a:effectLst/>
-                <a:uLnTx/>
-                <a:uFillTx/>
-                <a:latin typeface="Century Gothic"/>
-              </a:rPr>
-            </a:br>
-            <a:r>
-              <a:rPr kumimoji="0" lang="zh-TW" altLang="zh-TW" sz="1800" b="1" i="0" u="none" strike="noStrike" kern="1200" cap="none" spc="0" normalizeH="0" baseline="0" noProof="0" dirty="0">
-                <a:ln>
-                  <a:noFill/>
-                </a:ln>
-                <a:solidFill>
-                  <a:prstClr val="black">
-                    <a:lumMod val="85000"/>
-                    <a:lumOff val="15000"/>
-                  </a:prstClr>
-                </a:solidFill>
-                <a:effectLst/>
-                <a:uLnTx/>
-                <a:uFillTx/>
-                <a:latin typeface="Century Gothic"/>
-              </a:rPr>
-              <a:t>作業系統</a:t>
-            </a:r>
-            <a:r>
-              <a:rPr kumimoji="0" lang="zh-TW" altLang="zh-TW" sz="1800" b="0" i="0" u="none" strike="noStrike" kern="1200" cap="none" spc="0" normalizeH="0" baseline="0" noProof="0" dirty="0">
-                <a:ln>
-                  <a:noFill/>
-                </a:ln>
-                <a:solidFill>
-                  <a:prstClr val="black">
-                    <a:lumMod val="85000"/>
-                    <a:lumOff val="15000"/>
-                  </a:prstClr>
-                </a:solidFill>
-                <a:effectLst/>
-                <a:uLnTx/>
-                <a:uFillTx/>
-                <a:latin typeface="Century Gothic"/>
-              </a:rPr>
-              <a:t>：</a:t>
-            </a:r>
-            <a:r>
-              <a:rPr kumimoji="0" lang="zh-TW" altLang="zh-TW" sz="1800" b="0" i="0" u="none" strike="noStrike" kern="1200" cap="none" spc="0" normalizeH="0" baseline="0" noProof="0" dirty="0">
-                <a:ln>
-                  <a:noFill/>
-                </a:ln>
-                <a:solidFill>
-                  <a:prstClr val="black">
-                    <a:lumMod val="85000"/>
-                    <a:lumOff val="15000"/>
-                  </a:prstClr>
-                </a:solidFill>
-                <a:effectLst/>
-                <a:highlight>
-                  <a:srgbClr val="FFFF00"/>
-                </a:highlight>
-                <a:uLnTx/>
-                <a:uFillTx/>
-                <a:latin typeface="Century Gothic"/>
-              </a:rPr>
-              <a:t>ubuntu-2204</a:t>
-            </a:r>
-            <a:r>
-              <a:rPr kumimoji="0" lang="zh-TW" altLang="zh-TW" sz="1800" b="0" i="0" u="none" strike="noStrike" kern="1200" cap="none" spc="0" normalizeH="0" baseline="0" noProof="0" dirty="0">
-                <a:ln>
-                  <a:noFill/>
-                </a:ln>
-                <a:solidFill>
-                  <a:prstClr val="black">
-                    <a:lumMod val="85000"/>
-                    <a:lumOff val="15000"/>
-                  </a:prstClr>
-                </a:solidFill>
-                <a:effectLst/>
-                <a:uLnTx/>
-                <a:uFillTx/>
-                <a:latin typeface="Century Gothic"/>
-              </a:rPr>
-              <a:t>-jammy。 </a:t>
-            </a:r>
-            <a:br>
-              <a:rPr kumimoji="0" lang="zh-TW" altLang="zh-TW" sz="1100" b="0" i="0" u="none" strike="noStrike" kern="1200" cap="none" spc="0" normalizeH="0" baseline="0" noProof="0" dirty="0">
-                <a:ln>
-                  <a:noFill/>
-                </a:ln>
-                <a:solidFill>
-                  <a:prstClr val="black">
-                    <a:lumMod val="85000"/>
-                    <a:lumOff val="15000"/>
-                  </a:prstClr>
-                </a:solidFill>
-                <a:effectLst/>
-                <a:uLnTx/>
-                <a:uFillTx/>
-                <a:latin typeface="Century Gothic"/>
-              </a:rPr>
-            </a:br>
+            <a:br/>
+            <a:r>
+              <a:t>位置：asia-east1-b（位於台灣彰濱工業區的機房，對台灣使用者而言連線速度最快）。</a:t>
+            </a:r>
+            <a:br/>
+            <a:r>
+              <a:t>機型：e2-micro（配備 1 核心 vCPU、1 GB 記憶體），這是 Google 提供給新用戶或特定區域的輕量級機型。</a:t>
+            </a:r>
+            <a:br/>
+            <a:r>
+              <a:t>作業系統：ubuntu-2204-jammy。 </a:t>
+            </a:r>
+            <a:br/>
             <a:endParaRPr lang="zh-TW" altLang="en-US" dirty="0"/>
           </a:p>
         </p:txBody>
@@ -15834,20 +15313,7 @@
           <a:p>
             <a:pPr lvl="1"/>
             <a:r>
-              <a:rPr lang="zh-TW" altLang="zh-TW" sz="2400" b="1" dirty="0"/>
-              <a:t>名稱</a:t>
-            </a:r>
-            <a:r>
-              <a:rPr lang="zh-TW" altLang="zh-TW" sz="2400" dirty="0"/>
-              <a:t>：輸入 </a:t>
-            </a:r>
-            <a:r>
-              <a:rPr lang="zh-TW" altLang="zh-TW" dirty="0"/>
-              <a:t>tw-autotrader</a:t>
-            </a:r>
-            <a:r>
-              <a:rPr lang="zh-TW" altLang="zh-TW" sz="2400" dirty="0"/>
-              <a:t>。</a:t>
+              <a:t>名稱：輸入 tw-selfselect（可自取，需與 .env 的 SYNC_VM_NAME 一致）。</a:t>
             </a:r>
           </a:p>
           <a:p>
@@ -16352,24 +15818,7 @@
           <a:p>
             <a:pPr lvl="1"/>
             <a:r>
-              <a:rPr lang="zh-TW" altLang="zh-TW" dirty="0"/>
-              <a:t>在列表中，您會看到一筆目前分配給 </a:t>
-            </a:r>
-            <a:r>
-              <a:rPr lang="zh-TW" altLang="zh-TW" sz="1400" dirty="0"/>
-              <a:t>tw-autotrader</a:t>
-            </a:r>
-            <a:r>
-              <a:rPr lang="zh-TW" altLang="zh-TW" dirty="0"/>
-              <a:t> 的 IP 紀錄，其「類型」此時顯示為 </a:t>
-            </a:r>
-            <a:r>
-              <a:rPr lang="zh-TW" altLang="zh-TW" b="1" dirty="0"/>
-              <a:t>外網/暫時</a:t>
-            </a:r>
-            <a:r>
-              <a:rPr lang="zh-TW" altLang="zh-TW" dirty="0"/>
-              <a:t>（Ephemeral）。</a:t>
+              <a:t>在列表中，您會看到一筆目前分配給 tw-selfselect 的 IP 紀錄，其「類型」此時顯示為 外網/暫時（Ephemeral）。</a:t>
             </a:r>
           </a:p>
           <a:p>
@@ -16428,16 +15877,7 @@
           <a:p>
             <a:pPr lvl="1"/>
             <a:r>
-              <a:rPr lang="zh-TW" altLang="zh-TW" dirty="0"/>
-              <a:t>在彈出的視窗中，為這個靜態 IP 取一個名字（例如：</a:t>
-            </a:r>
-            <a:r>
-              <a:rPr lang="zh-TW" altLang="zh-TW" sz="1400" dirty="0"/>
-              <a:t>tw-autotrader-static-ip</a:t>
-            </a:r>
-            <a:r>
-              <a:rPr lang="zh-TW" altLang="zh-TW" dirty="0"/>
-              <a:t>）。</a:t>
+              <a:t>在彈出的視窗中，為這個靜態 IP 取一個名字（例如：tw-selfselect-static-ip）。</a:t>
             </a:r>
           </a:p>
           <a:p>
@@ -16888,47 +16328,19 @@
           <a:lstStyle/>
           <a:p>
             <a:r>
-              <a:rPr lang="zh-TW" altLang="en-US" dirty="0"/>
-              <a:t>謝宜軒</a:t>
-            </a:r>
-            <a:r>
-              <a:rPr lang="en-US" altLang="zh-TW" dirty="0"/>
-              <a:t>,</a:t>
-            </a:r>
-            <a:r>
-              <a:rPr lang="zh-TW" altLang="en-US" dirty="0"/>
-              <a:t>交通大學資訊工程碩士</a:t>
-            </a:r>
-            <a:br>
-              <a:rPr lang="en-US" dirty="0"/>
-            </a:br>
-            <a:r>
-              <a:rPr lang="zh-TW" altLang="en-US" dirty="0"/>
+              <a:t>謝宜軒,交通大學資訊工程碩士</a:t>
+            </a:r>
+            <a:br/>
+            <a:r>
               <a:t>三十年資訊軟硬件設計經歷</a:t>
             </a:r>
-            <a:br>
-              <a:rPr lang="en-US" altLang="zh-TW" dirty="0"/>
-            </a:br>
-            <a:r>
-              <a:rPr lang="en-US" altLang="zh-TW" dirty="0">
-                <a:hlinkClick r:id="rId2"/>
-              </a:rPr>
-              <a:t>https://github.com/dinchentech/tw-autotrader</a:t>
-            </a:r>
-            <a:br>
-              <a:rPr lang="en-US" altLang="zh-TW" dirty="0"/>
-            </a:br>
-            <a:r>
-              <a:rPr lang="zh-TW" altLang="en-US" dirty="0"/>
-              <a:t>開源</a:t>
-            </a:r>
-            <a:r>
-              <a:rPr lang="en-US" altLang="zh-TW" dirty="0" err="1"/>
-              <a:t>tw-autotrader</a:t>
-            </a:r>
-            <a:r>
-              <a:rPr lang="zh-TW" altLang="en-US" dirty="0"/>
-              <a:t>台股買賣自動化系統作者</a:t>
+            <a:br/>
+            <a:r>
+              <a:t>https://github.com/dinchentech/tw-selfselect</a:t>
+            </a:r>
+            <a:br/>
+            <a:r>
+              <a:t>開源tw-selfselect台股買賣自動化系統作者</a:t>
             </a:r>
             <a:endParaRPr lang="en-US" dirty="0"/>
           </a:p>
@@ -18141,32 +17553,9 @@
               <a:buNone/>
             </a:pPr>
             <a:r>
-              <a:rPr lang="en-US" sz="3800" b="1" kern="1200" dirty="0">
-                <a:solidFill>
-                  <a:schemeClr val="tx1">
-                    <a:lumMod val="85000"/>
-                    <a:lumOff val="15000"/>
-                  </a:schemeClr>
-                </a:solidFill>
-                <a:latin typeface="+mn-lt"/>
-                <a:ea typeface="+mn-lt"/>
-                <a:cs typeface="+mn-lt"/>
-              </a:rPr>
-              <a:t>https://dinchentech.github.io/tw-autotrader/</a:t>
-            </a:r>
-            <a:br>
-              <a:rPr lang="en-US" sz="1800" b="1" kern="1200" dirty="0">
-                <a:solidFill>
-                  <a:schemeClr val="tx1">
-                    <a:lumMod val="85000"/>
-                    <a:lumOff val="15000"/>
-                  </a:schemeClr>
-                </a:solidFill>
-                <a:latin typeface="+mn-lt"/>
-                <a:ea typeface="+mn-lt"/>
-                <a:cs typeface="+mn-lt"/>
-              </a:rPr>
-            </a:br>
+              <a:t>（母專案示範儀表板）https://dinchentech.github.io/tw-autotrader/</a:t>
+            </a:r>
+            <a:br/>
             <a:endParaRPr lang="en-US" dirty="0"/>
           </a:p>
         </p:txBody>

--- a/plans/ppt/TW-SELFSELECT台股買賣自動化系統-W1-講稿版.pptx
+++ b/plans/ppt/TW-SELFSELECT台股買賣自動化系統-W1-講稿版.pptx
@@ -4669,34 +4669,24 @@
           <a:lstStyle/>
           <a:p>
             <a:r>
-              <a:t>⏱ 建議時間：1 分鐘</a:t>
+              <a:t>⏱ 建議時間：1 分 30 秒</a:t>
             </a:r>
           </a:p>
           <a:p/>
           <a:p>
             <a:r>
-              <a:t>光說不練沒意思，我們直接看實際運行的畫面。</a:t>
-            </a:r>
-          </a:p>
-          <a:p>
-            <a:r>
-              <a:t>這是系統的實際運行展示頁面，網址在這裡——這是母專案（tw-autotrader）的示範儀表板：dinchentech.github.io/tw-autotrader。</a:t>
-            </a:r>
-          </a:p>
-          <a:p>
-            <a:r>
-              <a:t>大家可以看看它跑起來的樣子：策略怎麼觸發、買賣訊號怎麼產生、Telegram 通知長什麼樣。</a:t>
-            </a:r>
-          </a:p>
-          <a:p>
-            <a:r>
-              <a:t>---</a:t>
+              <a:t>這是本專案的儀表板示範頁：https://dinchentech.github.io/tw-selfselect/ ，頁面資料是**範例**、不是真實績效。</a:t>
+            </a:r>
+          </a:p>
+          <a:p>
+            <a:r>
+              <a:t>實機運作時，VM 每天 13:45 會產生 logs/dashboard.html（只留在 VM，不進版控）；這個 Pages 頁面是給學員「看長什麼樣子」用的預覽。</a:t>
             </a:r>
           </a:p>
           <a:p/>
           <a:p>
             <a:r>
-              <a:t>【講師提示】建議現場直接開網頁示範，點擊頁面讓大家感受真實操作介面。</a:t>
+              <a:t>【講師提示】示範頁有註明範例資料；強調真實數據在 VM 的 logs/，不要把示範頁數字當績效。</a:t>
             </a:r>
           </a:p>
         </p:txBody>
@@ -17514,73 +17504,10 @@
       </p:sp>
       <p:sp>
         <p:nvSpPr>
-          <p:cNvPr id="13" name="內容版面配置區 3">
-            <a:extLst>
-              <a:ext uri="{FF2B5EF4-FFF2-40B4-BE49-F238E27FC236}">
-                <a16:creationId xmlns:a16="http://schemas.microsoft.com/office/drawing/2014/main" id="{AA7CC225-0541-6C1B-44A6-A09C6AF90C80}"/>
-              </a:ext>
-            </a:extLst>
-          </p:cNvPr>
-          <p:cNvSpPr>
-            <a:spLocks noGrp="1"/>
-          </p:cNvSpPr>
-          <p:nvPr>
-            <p:ph idx="1"/>
-            <p:extLst>
-              <p:ext uri="{E7BDC344-281C-4309-B0C6-D0EE65EED2A8}">
-                <p202:designPr xmlns:p202="http://schemas.microsoft.com/office/powerpoint/2020/02/main">
-                  <p202:designTagLst>
-                    <p202:designTag name="ARCH:1:CLS" val="LargePlainText"/>
-                  </p202:designTagLst>
-                </p202:designPr>
-              </p:ext>
-            </p:extLst>
-          </p:nvPr>
-        </p:nvSpPr>
-        <p:spPr>
-          <a:xfrm>
-            <a:off x="4799012" y="457200"/>
-            <a:ext cx="6324600" cy="838200"/>
-          </a:xfrm>
-        </p:spPr>
-        <p:txBody>
-          <a:bodyPr>
-            <a:normAutofit fontScale="55000" lnSpcReduction="20000"/>
-          </a:bodyPr>
-          <a:lstStyle/>
-          <a:p>
-            <a:pPr indent="0">
-              <a:buNone/>
-            </a:pPr>
-            <a:r>
-              <a:t>（母專案示範儀表板）https://dinchentech.github.io/tw-autotrader/</a:t>
-            </a:r>
-            <a:br/>
-            <a:endParaRPr lang="en-US" dirty="0"/>
-          </a:p>
-        </p:txBody>
-      </p:sp>
-      <p:pic>
-        <p:nvPicPr>
-          <p:cNvPr id="7" name="圖片 6">
-            <a:extLst>
-              <a:ext uri="{FF2B5EF4-FFF2-40B4-BE49-F238E27FC236}">
-                <a16:creationId xmlns:a16="http://schemas.microsoft.com/office/drawing/2014/main" id="{91376C30-1F24-DEC8-AF76-298A03D8FAF4}"/>
-              </a:ext>
-            </a:extLst>
-          </p:cNvPr>
-          <p:cNvPicPr>
-            <a:picLocks noChangeAspect="1"/>
-          </p:cNvPicPr>
+          <p:cNvPr id="19" name="TextBox 18"/>
+          <p:cNvSpPr txBox="1"/>
           <p:nvPr/>
-        </p:nvPicPr>
-        <p:blipFill>
-          <a:blip r:embed="rId2"/>
-          <a:srcRect r="4" b="11789"/>
-          <a:stretch>
-            <a:fillRect/>
-          </a:stretch>
-        </p:blipFill>
+        </p:nvSpPr>
         <p:spPr>
           <a:xfrm>
             <a:off x="4778374" y="1219200"/>
@@ -17591,7 +17518,133 @@
           </a:prstGeom>
           <a:noFill/>
         </p:spPr>
-      </p:pic>
+        <p:txBody>
+          <a:bodyPr wrap="square" anchor="t">
+            <a:spAutoFit/>
+          </a:bodyPr>
+          <a:lstStyle/>
+          <a:p>
+            <a:pPr algn="l">
+              <a:spcAft>
+                <a:spcPts val="600"/>
+              </a:spcAft>
+            </a:pPr>
+            <a:r>
+              <a:rPr sz="2400" b="1">
+                <a:solidFill>
+                  <a:srgbClr val="113A6B"/>
+                </a:solidFill>
+              </a:rPr>
+              <a:t>線上儀表板（示範資料）</a:t>
+            </a:r>
+          </a:p>
+          <a:p>
+            <a:pPr>
+              <a:spcAft>
+                <a:spcPts val="600"/>
+              </a:spcAft>
+            </a:pPr>
+            <a:r>
+              <a:rPr sz="1600" b="0">
+                <a:solidFill>
+                  <a:srgbClr val="115599"/>
+                </a:solidFill>
+              </a:rPr>
+              <a:t>https://dinchentech.github.io/tw-selfselect/</a:t>
+            </a:r>
+          </a:p>
+          <a:p>
+            <a:pPr>
+              <a:spcAft>
+                <a:spcPts val="600"/>
+              </a:spcAft>
+            </a:pPr>
+            <a:r>
+              <a:rPr sz="1600" b="1">
+                <a:solidFill>
+                  <a:srgbClr val="222222"/>
+                </a:solidFill>
+              </a:rPr>
+              <a:t>內容：</a:t>
+            </a:r>
+          </a:p>
+          <a:p>
+            <a:pPr>
+              <a:spcAft>
+                <a:spcPts val="600"/>
+              </a:spcAft>
+            </a:pPr>
+            <a:r>
+              <a:rPr sz="1400" b="0">
+                <a:solidFill>
+                  <a:srgbClr val="222222"/>
+                </a:solidFill>
+              </a:rPr>
+              <a:t>• KPI 卡片：已實現／未實現損益、交易筆數、報酬率</a:t>
+            </a:r>
+          </a:p>
+          <a:p>
+            <a:pPr>
+              <a:spcAft>
+                <a:spcPts val="600"/>
+              </a:spcAft>
+            </a:pPr>
+            <a:r>
+              <a:rPr sz="1400" b="0">
+                <a:solidFill>
+                  <a:srgbClr val="222222"/>
+                </a:solidFill>
+              </a:rPr>
+              <a:t>• 持倉一覽：代號、股數、成本、現價、市值、損益</a:t>
+            </a:r>
+          </a:p>
+          <a:p>
+            <a:pPr>
+              <a:spcAft>
+                <a:spcPts val="600"/>
+              </a:spcAft>
+            </a:pPr>
+            <a:r>
+              <a:rPr sz="1400" b="0">
+                <a:solidFill>
+                  <a:srgbClr val="222222"/>
+                </a:solidFill>
+              </a:rPr>
+              <a:t>• 資金曲線（Chart.js 互動圖）與交易明細</a:t>
+            </a:r>
+          </a:p>
+          <a:p>
+            <a:pPr>
+              <a:spcAft>
+                <a:spcPts val="600"/>
+              </a:spcAft>
+            </a:pPr>
+            <a:r>
+              <a:rPr sz="1200" b="0">
+                <a:solidFill>
+                  <a:srgbClr val="666666"/>
+                </a:solidFill>
+              </a:rPr>
+              <a:t>• 實機版：VM 每日 13:45 產生 logs/dashboard.html（不進版控）</a:t>
+            </a:r>
+          </a:p>
+          <a:p>
+            <a:pPr>
+              <a:spcAft>
+                <a:spcPts val="600"/>
+              </a:spcAft>
+            </a:pPr>
+            <a:r>
+              <a:rPr sz="1200" b="0">
+                <a:solidFill>
+                  <a:srgbClr val="666666"/>
+                </a:solidFill>
+              </a:rPr>
+              <a:t>（此頁為範例資料，非真實交易績效）</a:t>
+            </a:r>
+          </a:p>
+        </p:txBody>
+      </p:sp>
     </p:spTree>
     <p:extLst>
       <p:ext uri="{BB962C8B-B14F-4D97-AF65-F5344CB8AC3E}">

--- a/plans/ppt/TW-SELFSELECT台股買賣自動化系統-W1-講稿版.pptx
+++ b/plans/ppt/TW-SELFSELECT台股買賣自動化系統-W1-講稿版.pptx
@@ -4568,7 +4568,7 @@
           </a:p>
           <a:p>
             <a:r>
-              <a:t>第一，所有策略源碼公開——只有主程式在 GitHub 上是加密檔。購買教程之後，會提供 WSL 壓縮檔；執行源碼的部分，可以等你先用加密檔測試、覺得 OK 之後再購買。</a:t>
+              <a:t>第一，原始碼**全部公開**在 GitHub（MIT 授權）——沒有加密檔，所有程式都看得到、也改得動；WSL 壓縮檔只是幫你省安裝時間而已。</a:t>
             </a:r>
           </a:p>
           <a:p>
@@ -4588,18 +4588,13 @@
           </a:p>
           <a:p>
             <a:r>
-              <a:t>最後要提醒大家：雖然我們有提供主程式源碼，但我建議大家使用我們長期測試過的版本就好，你要做的就是修改內建策略參數，或是加上你自己的策略。</a:t>
-            </a:r>
-          </a:p>
-          <a:p>
-            <a:r>
-              <a:t>---</a:t>
+              <a:t>最後提醒：建議大家直接使用 repo 上長期測試過的版本，你要做的就是修改內建策略參數，或是加上你自己的策略。</a:t>
             </a:r>
           </a:p>
           <a:p/>
           <a:p>
             <a:r>
-              <a:t>【講師提示】講到「長期測試過」時可以稍微強調，這是降低學員踩雷風險的關鍵提醒。</a:t>
+              <a:t>【講師提示】強調「公開源碼 + 建議用測試過的版本」兩件事不衝突：看得懂、改得動，但不必自己重造輪子。</a:t>
             </a:r>
           </a:p>
         </p:txBody>
@@ -17228,161 +17223,29 @@
           </a:bodyPr>
           <a:lstStyle/>
           <a:p>
-            <a:pPr marL="331470" indent="-285750">
-              <a:buFont typeface="Arial" panose="020B0604020202020204" pitchFamily="34" charset="0"/>
-              <a:buChar char="•"/>
-            </a:pPr>
-            <a:r>
-              <a:rPr lang="zh-TW" altLang="en-US" dirty="0"/>
-              <a:t>所有源碼公開</a:t>
-            </a:r>
-            <a:r>
-              <a:rPr lang="en-US" altLang="zh-TW" dirty="0"/>
-              <a:t>,</a:t>
-            </a:r>
-            <a:r>
-              <a:rPr lang="zh-TW" altLang="en-US" dirty="0"/>
-              <a:t> 只有主程式於</a:t>
-            </a:r>
-            <a:r>
-              <a:rPr lang="en-US" altLang="zh-TW" dirty="0"/>
-              <a:t>git</a:t>
-            </a:r>
-            <a:r>
-              <a:rPr lang="zh-TW" altLang="en-US" dirty="0"/>
-              <a:t>上給加密檔</a:t>
-            </a:r>
-            <a:r>
-              <a:rPr lang="en-US" altLang="zh-TW" dirty="0"/>
-              <a:t>,</a:t>
-            </a:r>
-            <a:r>
-              <a:rPr lang="zh-TW" altLang="en-US" dirty="0"/>
-              <a:t> 買教程會提供</a:t>
-            </a:r>
-            <a:r>
-              <a:rPr lang="en-US" altLang="zh-TW" dirty="0"/>
-              <a:t>WSL</a:t>
-            </a:r>
-            <a:r>
-              <a:rPr lang="zh-TW" altLang="en-US" dirty="0"/>
-              <a:t>壓縮檔及源碼</a:t>
-            </a:r>
-            <a:r>
-              <a:rPr lang="en-US" altLang="zh-TW" dirty="0"/>
-              <a:t>.</a:t>
-            </a:r>
-          </a:p>
-          <a:p>
-            <a:pPr marL="331470" indent="-285750">
-              <a:buFont typeface="Arial" panose="020B0604020202020204" pitchFamily="34" charset="0"/>
-              <a:buChar char="•"/>
-            </a:pPr>
-            <a:r>
-              <a:rPr lang="zh-TW" altLang="en-US" dirty="0"/>
-              <a:t>設定好策略後</a:t>
-            </a:r>
-            <a:r>
-              <a:rPr lang="en-US" altLang="zh-TW" dirty="0"/>
-              <a:t>,</a:t>
-            </a:r>
-            <a:r>
-              <a:rPr lang="zh-TW" altLang="en-US" dirty="0"/>
-              <a:t>自動買賣</a:t>
-            </a:r>
-            <a:r>
-              <a:rPr lang="en-US" altLang="zh-TW" dirty="0"/>
-              <a:t>,</a:t>
-            </a:r>
-            <a:r>
-              <a:rPr lang="zh-TW" altLang="en-US" dirty="0"/>
-              <a:t>不用整天盯盤</a:t>
-            </a:r>
-            <a:endParaRPr lang="en-US" altLang="zh-TW" dirty="0"/>
-          </a:p>
-          <a:p>
-            <a:pPr marL="331470" indent="-285750">
-              <a:buFont typeface="Arial" panose="020B0604020202020204" pitchFamily="34" charset="0"/>
-              <a:buChar char="•"/>
-            </a:pPr>
-            <a:r>
-              <a:rPr lang="zh-TW" altLang="en-US" dirty="0"/>
-              <a:t>利用免費的</a:t>
-            </a:r>
-            <a:r>
-              <a:rPr lang="en-US" altLang="zh-TW" dirty="0"/>
-              <a:t>TWSE</a:t>
-            </a:r>
-            <a:r>
-              <a:rPr lang="zh-TW" altLang="en-US" dirty="0"/>
-              <a:t>及</a:t>
-            </a:r>
-            <a:r>
-              <a:rPr lang="en-US" altLang="zh-TW" dirty="0" err="1"/>
-              <a:t>Finmind</a:t>
-            </a:r>
-            <a:r>
-              <a:rPr lang="zh-TW" altLang="en-US" dirty="0"/>
-              <a:t>額度即可回測</a:t>
-            </a:r>
-            <a:r>
-              <a:rPr lang="en-US" altLang="zh-TW" dirty="0"/>
-              <a:t>,</a:t>
-            </a:r>
-            <a:r>
-              <a:rPr lang="zh-TW" altLang="en-US" dirty="0"/>
-              <a:t>不用再花錢買資料庫</a:t>
-            </a:r>
-            <a:endParaRPr lang="en-US" altLang="zh-TW" dirty="0"/>
-          </a:p>
-          <a:p>
-            <a:pPr marL="331470" indent="-285750">
-              <a:buFont typeface="Arial" panose="020B0604020202020204" pitchFamily="34" charset="0"/>
-              <a:buChar char="•"/>
-            </a:pPr>
+            <a:r>
+              <a:t>原始碼全部公開在 GitHub（MIT 授權），可直接 git clone；沒有加密檔，WSL 壓縮檔只是省安裝時間</a:t>
+            </a:r>
+          </a:p>
+          <a:p>
+            <a:r>
+              <a:t>設定好策略後,自動買賣,不用整天盯盤</a:t>
+            </a:r>
+          </a:p>
+          <a:p>
+            <a:r>
+              <a:t>利用免費的TWSE及Finmind額度即可回測,不用再花錢買資料庫</a:t>
+            </a:r>
+          </a:p>
+          <a:p>
             <a:r>
               <a:t>五大策略(布林通道/MA Cross/VWAP反轉/唐奇安通道/低接高賣)已含括大部分盤勢, 並預留4個預備策略</a:t>
             </a:r>
-            <a:endParaRPr lang="en-US" altLang="zh-TW" dirty="0"/>
-          </a:p>
-          <a:p>
-            <a:pPr marL="331470" indent="-285750">
-              <a:buFont typeface="Arial" panose="020B0604020202020204" pitchFamily="34" charset="0"/>
-              <a:buChar char="•"/>
-            </a:pPr>
-            <a:r>
-              <a:rPr lang="zh-TW" altLang="en-US" dirty="0"/>
-              <a:t>雖然</a:t>
-            </a:r>
-            <a:r>
-              <a:rPr lang="en-US" altLang="zh-TW" dirty="0"/>
-              <a:t>,</a:t>
-            </a:r>
-            <a:r>
-              <a:rPr lang="zh-TW" altLang="en-US" dirty="0"/>
-              <a:t>我們有給主程式源碼</a:t>
-            </a:r>
-            <a:r>
-              <a:rPr lang="en-US" altLang="zh-TW" dirty="0"/>
-              <a:t>,</a:t>
-            </a:r>
-            <a:r>
-              <a:rPr lang="zh-TW" altLang="en-US" dirty="0"/>
-              <a:t>但建議使用者使用我們長期測試過的版本</a:t>
-            </a:r>
-            <a:r>
-              <a:rPr lang="en-US" altLang="zh-TW" dirty="0"/>
-              <a:t>,</a:t>
-            </a:r>
-            <a:r>
-              <a:rPr lang="zh-TW" altLang="en-US" dirty="0"/>
-              <a:t>只要修改內建策略參數或加上你自己的策略即可</a:t>
-            </a:r>
-            <a:r>
-              <a:rPr lang="en-US" altLang="zh-TW" dirty="0"/>
-              <a:t>.</a:t>
-            </a:r>
-            <a:endParaRPr lang="en-US" dirty="0"/>
+          </a:p>
+          <a:p>
+            <a:r>
+              <a:t>建議以 repo 上長期測試過的版本為主，只要修改內建策略參數或加上你自己的策略即可</a:t>
+            </a:r>
           </a:p>
         </p:txBody>
       </p:sp>

--- a/plans/ppt/TW-SELFSELECT台股買賣自動化系統-W1-講稿版.pptx
+++ b/plans/ppt/TW-SELFSELECT台股買賣自動化系統-W1-講稿版.pptx
@@ -4242,7 +4242,7 @@
           </a:p>
           <a:p>
             <a:r>
-              <a:t>這套 tw-selfselect 台股買賣自動化系統，是我開源放在 GitHub 上的專案——意思是所有原始碼都公開，你隨時可以上網看、可以學、可以改。</a:t>
+              <a:t>這套 tw-selfselect 台股買賣自動化系統，是我公開放在 GitHub 上的專案——原始碼都看得到、可以學、可以改；授權為個人學習／研究使用，商業使用須經書面授權（詳見 LICENSE）。</a:t>
             </a:r>
           </a:p>
           <a:p>
@@ -4568,7 +4568,7 @@
           </a:p>
           <a:p>
             <a:r>
-              <a:t>第一，原始碼**全部公開**在 GitHub（MIT 授權）——沒有加密檔，所有程式都看得到、也改得動；WSL 壓縮檔只是幫你省安裝時間而已。</a:t>
+              <a:t>第一，原始碼**全部公開**在 GitHub（授權見 LICENSE：個人學習／研究使用，商業使用須經書面授權）——沒有加密檔，所有程式都看得到、也改得動；WSL 壓縮檔只是幫你省安裝時間而已。</a:t>
             </a:r>
           </a:p>
           <a:p>
@@ -16325,7 +16325,7 @@
             </a:r>
             <a:br/>
             <a:r>
-              <a:t>開源tw-selfselect台股買賣自動化系統作者</a:t>
+              <a:t>tw-selfselect 台股買賣自動化系統作者（原始碼公開）</a:t>
             </a:r>
             <a:endParaRPr lang="en-US" dirty="0"/>
           </a:p>
@@ -17224,7 +17224,7 @@
           <a:lstStyle/>
           <a:p>
             <a:r>
-              <a:t>原始碼全部公開在 GitHub（MIT 授權），可直接 git clone；沒有加密檔，WSL 壓縮檔只是省安裝時間</a:t>
+              <a:t>原始碼全部公開在 GitHub（授權見 LICENSE：個人學習／研究使用），可直接 git clone；沒有加密檔，WSL 壓縮檔只是省安裝時間</a:t>
             </a:r>
           </a:p>
           <a:p>

--- a/plans/ppt/TW-SELFSELECT台股買賣自動化系統-W1-講稿版.pptx
+++ b/plans/ppt/TW-SELFSELECT台股買賣自動化系統-W1-講稿版.pptx
@@ -17458,7 +17458,7 @@
                   <a:srgbClr val="222222"/>
                 </a:solidFill>
               </a:rPr>
-              <a:t>• 持倉一覽：代號、股數、成本、現價、市值、損益</a:t>
+              <a:t>• 持倉一覽：代號、策略（keep_wait／auto→X）、股數、成本、現價、市值、損益</a:t>
             </a:r>
           </a:p>
           <a:p>

--- a/plans/ppt/TW-SELFSELECT台股買賣自動化系統-W1-講稿版.pptx
+++ b/plans/ppt/TW-SELFSELECT台股買賣自動化系統-W1-講稿版.pptx
@@ -17365,16 +17365,91 @@
           </a:p>
         </p:txBody>
       </p:sp>
-      <p:sp>
-        <p:nvSpPr>
-          <p:cNvPr id="19" name="TextBox 18"/>
+      <p:pic>
+        <p:nvPicPr>
+          <p:cNvPr id="19" name="Picture 18" descr="dashboard_real_20261026.png"/>
+          <p:cNvPicPr>
+            <a:picLocks noChangeAspect="1"/>
+          </p:cNvPicPr>
+          <p:nvPr/>
+        </p:nvPicPr>
+        <p:blipFill>
+          <a:blip r:embed="rId4"/>
+          <a:stretch>
+            <a:fillRect/>
+          </a:stretch>
+        </p:blipFill>
+        <p:spPr>
+          <a:xfrm>
+            <a:off x="566928" y="1298448"/>
+            <a:ext cx="6309360" cy="4829947"/>
+          </a:xfrm>
+          <a:prstGeom prst="rect">
+            <a:avLst/>
+          </a:prstGeom>
+          <a:ln w="9525">
+            <a:solidFill>
+              <a:srgbClr val="BFC7D1"/>
+            </a:solidFill>
+          </a:ln>
+        </p:spPr>
+      </p:pic>
+      <p:sp>
+        <p:nvSpPr>
+          <p:cNvPr id="20" name="Rectangle 19"/>
+          <p:cNvSpPr/>
+          <p:nvPr/>
+        </p:nvSpPr>
+        <p:spPr>
+          <a:xfrm>
+            <a:off x="6903720" y="1298448"/>
+            <a:ext cx="5029200" cy="5230368"/>
+          </a:xfrm>
+          <a:prstGeom prst="rect">
+            <a:avLst/>
+          </a:prstGeom>
+          <a:solidFill>
+            <a:srgbClr val="FFFFFF"/>
+          </a:solidFill>
+          <a:ln w="9525">
+            <a:solidFill>
+              <a:srgbClr val="DDE3EA"/>
+            </a:solidFill>
+          </a:ln>
+          <a:effectLst/>
+        </p:spPr>
+        <p:style>
+          <a:lnRef idx="1">
+            <a:schemeClr val="accent1"/>
+          </a:lnRef>
+          <a:fillRef idx="3">
+            <a:schemeClr val="accent1"/>
+          </a:fillRef>
+          <a:effectRef idx="2">
+            <a:schemeClr val="accent1"/>
+          </a:effectRef>
+          <a:fontRef idx="minor">
+            <a:schemeClr val="lt1"/>
+          </a:fontRef>
+        </p:style>
+        <p:txBody>
+          <a:bodyPr rtlCol="0" anchor="ctr"/>
+          <a:lstStyle/>
+          <a:p>
+            <a:pPr algn="ctr"/>
+          </a:p>
+        </p:txBody>
+      </p:sp>
+      <p:sp>
+        <p:nvSpPr>
+          <p:cNvPr id="21" name="TextBox 20"/>
           <p:cNvSpPr txBox="1"/>
           <p:nvPr/>
         </p:nvSpPr>
         <p:spPr>
           <a:xfrm>
-            <a:off x="4778374" y="1219200"/>
-            <a:ext cx="6953250" cy="4953000"/>
+            <a:off x="7132320" y="1444752"/>
+            <a:ext cx="4572000" cy="5029200"/>
           </a:xfrm>
           <a:prstGeom prst="rect">
             <a:avLst/>
@@ -17382,128 +17457,198 @@
           <a:noFill/>
         </p:spPr>
         <p:txBody>
-          <a:bodyPr wrap="square" anchor="t">
+          <a:bodyPr wrap="square" lIns="0" rIns="0" tIns="0">
             <a:spAutoFit/>
           </a:bodyPr>
           <a:lstStyle/>
           <a:p>
-            <a:pPr algn="l">
+            <a:pPr>
+              <a:spcBef>
+                <a:spcPts val="1600"/>
+              </a:spcBef>
               <a:spcAft>
-                <a:spcPts val="600"/>
+                <a:spcPts val="0"/>
               </a:spcAft>
             </a:pPr>
             <a:r>
               <a:rPr sz="2400" b="1">
                 <a:solidFill>
-                  <a:srgbClr val="113A6B"/>
+                  <a:srgbClr val="111111"/>
                 </a:solidFill>
+                <a:latin typeface="Yu Gothic UI"/>
               </a:rPr>
-              <a:t>線上儀表板（示範資料）</a:t>
+              <a:t>線上儀表板</a:t>
             </a:r>
           </a:p>
           <a:p>
             <a:pPr>
+              <a:spcBef>
+                <a:spcPts val="600"/>
+              </a:spcBef>
               <a:spcAft>
-                <a:spcPts val="600"/>
+                <a:spcPts val="0"/>
               </a:spcAft>
             </a:pPr>
             <a:r>
-              <a:rPr sz="1600" b="0">
+              <a:rPr sz="1500" b="0">
                 <a:solidFill>
-                  <a:srgbClr val="115599"/>
+                  <a:srgbClr val="2B2B2B"/>
                 </a:solidFill>
+                <a:latin typeface="Yu Gothic UI"/>
+              </a:rPr>
+              <a:t>實機畫面（VM，2026-10-26）</a:t>
+            </a:r>
+          </a:p>
+          <a:p>
+            <a:pPr>
+              <a:spcBef>
+                <a:spcPts val="600"/>
+              </a:spcBef>
+              <a:spcAft>
+                <a:spcPts val="0"/>
+              </a:spcAft>
+            </a:pPr>
+            <a:r>
+              <a:rPr sz="1350" b="0">
+                <a:solidFill>
+                  <a:srgbClr val="2B2B2B"/>
+                </a:solidFill>
+                <a:latin typeface="Yu Gothic UI"/>
               </a:rPr>
               <a:t>https://dinchentech.github.io/tw-selfselect/</a:t>
             </a:r>
           </a:p>
           <a:p>
             <a:pPr>
+              <a:spcBef>
+                <a:spcPts val="1600"/>
+              </a:spcBef>
               <a:spcAft>
-                <a:spcPts val="600"/>
+                <a:spcPts val="0"/>
               </a:spcAft>
             </a:pPr>
             <a:r>
-              <a:rPr sz="1600" b="1">
+              <a:rPr sz="1700" b="1">
                 <a:solidFill>
-                  <a:srgbClr val="222222"/>
+                  <a:srgbClr val="111111"/>
                 </a:solidFill>
+                <a:latin typeface="Yu Gothic UI"/>
               </a:rPr>
               <a:t>內容：</a:t>
             </a:r>
           </a:p>
           <a:p>
             <a:pPr>
+              <a:spcBef>
+                <a:spcPts val="600"/>
+              </a:spcBef>
               <a:spcAft>
-                <a:spcPts val="600"/>
+                <a:spcPts val="0"/>
               </a:spcAft>
             </a:pPr>
             <a:r>
+              <a:rPr sz="1700" b="0">
+                <a:solidFill>
+                  <a:srgbClr val="2B2B2B"/>
+                </a:solidFill>
+                <a:latin typeface="Yu Gothic UI"/>
+              </a:rPr>
+              <a:t>• KPI 卡片：已實現／未實現損益、報酬率</a:t>
+            </a:r>
+          </a:p>
+          <a:p>
+            <a:pPr>
+              <a:spcBef>
+                <a:spcPts val="600"/>
+              </a:spcBef>
+              <a:spcAft>
+                <a:spcPts val="0"/>
+              </a:spcAft>
+            </a:pPr>
+            <a:r>
+              <a:rPr sz="1700" b="0">
+                <a:solidFill>
+                  <a:srgbClr val="2B2B2B"/>
+                </a:solidFill>
+                <a:latin typeface="Yu Gothic UI"/>
+              </a:rPr>
+              <a:t>• 持倉一覽：代號、股數、成本、現價、</a:t>
+            </a:r>
+          </a:p>
+          <a:p>
+            <a:pPr>
+              <a:spcBef>
+                <a:spcPts val="600"/>
+              </a:spcBef>
+              <a:spcAft>
+                <a:spcPts val="0"/>
+              </a:spcAft>
+            </a:pPr>
+            <a:r>
+              <a:rPr sz="1700" b="0">
+                <a:solidFill>
+                  <a:srgbClr val="2B2B2B"/>
+                </a:solidFill>
+                <a:latin typeface="Yu Gothic UI"/>
+              </a:rPr>
+              <a:t>　市值、損益，多一欄「策略」</a:t>
+            </a:r>
+          </a:p>
+          <a:p>
+            <a:pPr>
+              <a:spcBef>
+                <a:spcPts val="600"/>
+              </a:spcBef>
+              <a:spcAft>
+                <a:spcPts val="0"/>
+              </a:spcAft>
+            </a:pPr>
+            <a:r>
+              <a:rPr sz="1700" b="0">
+                <a:solidFill>
+                  <a:srgbClr val="2B2B2B"/>
+                </a:solidFill>
+                <a:latin typeface="Yu Gothic UI"/>
+              </a:rPr>
+              <a:t>• 資金曲線（Chart.js）與交易明細</a:t>
+            </a:r>
+          </a:p>
+          <a:p>
+            <a:pPr>
+              <a:spcBef>
+                <a:spcPts val="600"/>
+              </a:spcBef>
+              <a:spcAft>
+                <a:spcPts val="0"/>
+              </a:spcAft>
+            </a:pPr>
+            <a:r>
+              <a:rPr sz="1700" b="0">
+                <a:solidFill>
+                  <a:srgbClr val="2B2B2B"/>
+                </a:solidFill>
+                <a:latin typeface="Yu Gothic UI"/>
+              </a:rPr>
+              <a:t>• VM 每日 13:45 產生 logs/dashboard.html</a:t>
+            </a:r>
+          </a:p>
+          <a:p>
+            <a:pPr>
+              <a:spcBef>
+                <a:spcPts val="600"/>
+              </a:spcBef>
+              <a:spcAft>
+                <a:spcPts val="0"/>
+              </a:spcAft>
+            </a:pPr>
+            <a:r>
               <a:rPr sz="1400" b="0">
                 <a:solidFill>
-                  <a:srgbClr val="222222"/>
+                  <a:srgbClr val="2B2B2B"/>
                 </a:solidFill>
+                <a:latin typeface="Yu Gothic UI"/>
               </a:rPr>
-              <a:t>• KPI 卡片：已實現／未實現損益、交易筆數、報酬率</a:t>
-            </a:r>
-          </a:p>
-          <a:p>
-            <a:pPr>
-              <a:spcAft>
-                <a:spcPts val="600"/>
-              </a:spcAft>
-            </a:pPr>
-            <a:r>
-              <a:rPr sz="1400" b="0">
-                <a:solidFill>
-                  <a:srgbClr val="222222"/>
-                </a:solidFill>
-              </a:rPr>
-              <a:t>• 持倉一覽：代號、策略（keep_wait／auto→X）、股數、成本、現價、市值、損益</a:t>
-            </a:r>
-          </a:p>
-          <a:p>
-            <a:pPr>
-              <a:spcAft>
-                <a:spcPts val="600"/>
-              </a:spcAft>
-            </a:pPr>
-            <a:r>
-              <a:rPr sz="1400" b="0">
-                <a:solidFill>
-                  <a:srgbClr val="222222"/>
-                </a:solidFill>
-              </a:rPr>
-              <a:t>• 資金曲線（Chart.js 互動圖）與交易明細</a:t>
-            </a:r>
-          </a:p>
-          <a:p>
-            <a:pPr>
-              <a:spcAft>
-                <a:spcPts val="600"/>
-              </a:spcAft>
-            </a:pPr>
-            <a:r>
-              <a:rPr sz="1200" b="0">
-                <a:solidFill>
-                  <a:srgbClr val="666666"/>
-                </a:solidFill>
-              </a:rPr>
-              <a:t>• 實機版：VM 每日 13:45 產生 logs/dashboard.html（不進版控）</a:t>
-            </a:r>
-          </a:p>
-          <a:p>
-            <a:pPr>
-              <a:spcAft>
-                <a:spcPts val="600"/>
-              </a:spcAft>
-            </a:pPr>
-            <a:r>
-              <a:rPr sz="1200" b="0">
-                <a:solidFill>
-                  <a:srgbClr val="666666"/>
-                </a:solidFill>
-              </a:rPr>
-              <a:t>（此頁為範例資料，非真實交易績效）</a:t>
+              <a:t>（線上示範頁為範例資料；左圖為 VM 實機畫面）</a:t>
             </a:r>
           </a:p>
         </p:txBody>

--- a/plans/ppt/TW-SELFSELECT台股買賣自動化系統-W1-講稿版.pptx
+++ b/plans/ppt/TW-SELFSELECT台股買賣自動化系統-W1-講稿版.pptx
@@ -4670,18 +4670,18 @@
           <a:p/>
           <a:p>
             <a:r>
-              <a:t>這是本專案的儀表板示範頁：https://dinchentech.github.io/tw-selfselect/ ，頁面資料是**範例**、不是真實績效。</a:t>
-            </a:r>
-          </a:p>
-          <a:p>
-            <a:r>
-              <a:t>實機運作時，VM 每天 13:45 會產生 logs/dashboard.html（只留在 VM，不進版控）；這個 Pages 頁面是給學員「看長什麼樣子」用的預覽。</a:t>
+              <a:t>左邊是 VM 的**實機**儀表板截圖（2026-10-26 收盤後產生），右邊連結 https://dinchentech.github.io/tw-selfselect/ 是 Pages 上的**示範頁**、資料是範例。</a:t>
+            </a:r>
+          </a:p>
+          <a:p>
+            <a:r>
+              <a:t>看圖時帶學員注意三點：① KPI 卡片（已實現／未實現損益、報酬率）；② 持倉一覽多一欄「策略」——1301 顯示 auto→bollinger 表示是系統當月選股買的，keep_wait 的部位會直接標 keep_wait，沒有 PC_ 條目的就顯示「-」；③ 下面是資金曲線（Chart.js）。</a:t>
             </a:r>
           </a:p>
           <a:p/>
           <a:p>
             <a:r>
-              <a:t>【講師提示】示範頁有註明範例資料；強調真實數據在 VM 的 logs/，不要把示範頁數字當績效。</a:t>
+              <a:t>【講師提示】實機每天 13:45 產生 logs/dashboard.html（只留 VM、不進版控）；示範頁只是給學員「看長什麼樣子」，別把示範頁數字當績效。</a:t>
             </a:r>
           </a:p>
         </p:txBody>

--- a/plans/ppt/TW-SELFSELECT台股買賣自動化系統-W1-講稿版.pptx
+++ b/plans/ppt/TW-SELFSELECT台股買賣自動化系統-W1-講稿版.pptx
@@ -3214,11 +3214,6 @@
               <a:t>不管你有沒有程式基礎，這一整個系列課程結束之後，你都能把自己的投資策略，變成一台 24 小時自動運作的機器。</a:t>
             </a:r>
           </a:p>
-          <a:p>
-            <a:r>
-              <a:t>---</a:t>
-            </a:r>
-          </a:p>
           <a:p/>
           <a:p>
             <a:r>
@@ -3332,11 +3327,6 @@
               <a:t>它給了我四個方向：第一，核心部位加移動停利——大部分持倉抱緊吃主升段，但跌破季線或月線就減碼；第二，盯著毛利率和庫存轉折——Q1 毛利率 38%，是記憶體模組廠的史詩級數字，要小心的是毛利率連續兩季下滑、DRAM 合約價漲幅收斂、存貨週轉天數攀升這些訊號；第三，分批出場——循環股的鐵律是不要妄想賣在最高點，300、400、500 每過一個關卡出二到三成；第四，想清楚不利情境——漲多修正、市場重新定性，這些風險要先有心理準備。</a:t>
             </a:r>
           </a:p>
-          <a:p>
-            <a:r>
-              <a:t>---</a:t>
-            </a:r>
-          </a:p>
           <a:p/>
           <a:p>
             <a:r>
@@ -3439,11 +3429,6 @@
               <a:t>最後我要強調兩件事：第一，這是在 DSH 中的 AI 問答，不是一般對話型 AI——DSH 會先掃描專案內所有檔案，才能針對這個專案回答；第二，AI 說的不全對，但是很有參考價值。這是我們面對 AI 建議該有的心態。</a:t>
             </a:r>
           </a:p>
-          <a:p>
-            <a:r>
-              <a:t>---</a:t>
-            </a:r>
-          </a:p>
           <a:p/>
           <a:p>
             <a:r>
@@ -3638,11 +3623,6 @@
               <a:t>請大家到我們的 GitHub 專案頁面，找到 WSL 恢復的說明文件，先把環境準備好。下一頁開始，我們會實際走一遍雲端主機的申請流程。</a:t>
             </a:r>
           </a:p>
-          <a:p>
-            <a:r>
-              <a:t>---</a:t>
-            </a:r>
-          </a:p>
           <a:p/>
           <a:p>
             <a:r>
@@ -3745,11 +3725,6 @@
               <a:t>第二步，建立新專案：進到控制台，點「新建專案」，取個名字，比如 my-trader-project。</a:t>
             </a:r>
           </a:p>
-          <a:p>
-            <a:r>
-              <a:t>---</a:t>
-            </a:r>
-          </a:p>
           <a:p/>
           <a:p>
             <a:r>
@@ -3852,11 +3827,6 @@
               <a:t>確認右側預估費用後，點「建立」。建立完成後，你就能在列表看到這台機器在運行，透過「SSH」按鈕就能連進去操作。</a:t>
             </a:r>
           </a:p>
-          <a:p>
-            <a:r>
-              <a:t>---</a:t>
-            </a:r>
-          </a:p>
           <a:p/>
           <a:p>
             <a:r>
@@ -3954,11 +3924,6 @@
               <a:t>請把這個 IP 記錄下來——等一下申請玉山 API 的時候，要拿它去設白名單。設定完成後，類型會變成「靜態」，以後不管機器怎麼重啟關機，IP 都不會變了。</a:t>
             </a:r>
           </a:p>
-          <a:p>
-            <a:r>
-              <a:t>---</a:t>
-            </a:r>
-          </a:p>
           <a:p/>
           <a:p>
             <a:r>
@@ -4051,11 +4016,6 @@
               <a:t>今天的功課：把 slide-12 的五個帳號申請好、Gcloud 機器建起來、靜態 IP 設好。下週我們會開始裝系統、跑回測。我們下次見！</a:t>
             </a:r>
           </a:p>
-          <a:p>
-            <a:r>
-              <a:t>---</a:t>
-            </a:r>
-          </a:p>
           <a:p/>
           <a:p>
             <a:r>
@@ -4148,11 +4108,6 @@
               <a:t>如果你對哪一段特別有興趣，也可以隨時舉手打斷我。</a:t>
             </a:r>
           </a:p>
-          <a:p>
-            <a:r>
-              <a:t>---</a:t>
-            </a:r>
-          </a:p>
           <a:p/>
           <a:p>
             <a:r>
@@ -4245,11 +4200,6 @@
               <a:t>這套 tw-selfselect 台股買賣自動化系統，是我公開放在 GitHub 上的專案——原始碼都看得到、可以學、可以改；授權為個人學習／研究使用，商業使用須經書面授權（詳見 LICENSE）。</a:t>
             </a:r>
           </a:p>
-          <a:p>
-            <a:r>
-              <a:t>---</a:t>
-            </a:r>
-          </a:p>
           <a:p/>
           <a:p>
             <a:r>
@@ -4362,11 +4312,6 @@
               <a:t>不過我要先聲明一件事——我們教的是「策略量化」和「自動化」，不是股票投資建議。這一點很重要，請大家記住。</a:t>
             </a:r>
           </a:p>
-          <a:p>
-            <a:r>
-              <a:t>---</a:t>
-            </a:r>
-          </a:p>
           <a:p/>
           <a:p>
             <a:r>
@@ -4479,11 +4424,6 @@
               <a:t>最後，我們會給你一份完整的 WSL 壓縮檔，所有 Python、DSH 等工具都已經安裝好了，打開就能用。</a:t>
             </a:r>
           </a:p>
-          <a:p>
-            <a:r>
-              <a:t>---</a:t>
-            </a:r>
-          </a:p>
           <a:p/>
           <a:p>
             <a:r>
@@ -4775,11 +4715,6 @@
               <a:t>這不是靜態圖片，而是一個可以互動的分析工具。</a:t>
             </a:r>
           </a:p>
-          <a:p>
-            <a:r>
-              <a:t>---</a:t>
-            </a:r>
-          </a:p>
           <a:p/>
           <a:p>
             <a:r>
@@ -4870,11 +4805,6 @@
           <a:p>
             <a:r>
               <a:t>注意，這個條件是複合的——EPS 要高、股價要相對便宜。這種「用一句話描述篩選條件、AI 直接幫你做出可互動網頁」的能力，就是這門課你們會反覆用到的工作方式。</a:t>
-            </a:r>
-          </a:p>
-          <a:p>
-            <a:r>
-              <a:t>---</a:t>
             </a:r>
           </a:p>
           <a:p/>

--- a/plans/ppt/TW-SELFSELECT台股買賣自動化系統-W1-講稿版.pptx
+++ b/plans/ppt/TW-SELFSELECT台股買賣自動化系統-W1-講稿版.pptx
@@ -4411,7 +4411,7 @@
           </a:p>
           <a:p>
             <a:r>
-              <a:t>系統內建六組策略，另外預留四組讓你自己定義。回測資料方面，可以調用 Finmind 和 TWSE 的歷史股市資料——這些都是免費的。</a:t>
+              <a:t>系統內建五組策略，另外預留四組讓你自己定義。回測資料方面，可以調用 Finmind 和 TWSE 的歷史股市資料——這些都是免費的。</a:t>
             </a:r>
           </a:p>
           <a:p>
@@ -16883,11 +16883,11 @@
             </a:r>
             <a:r>
               <a:rPr lang="en-US" altLang="zh-TW" dirty="0"/>
-              <a:t>6</a:t>
+              <a:t>5</a:t>
             </a:r>
             <a:r>
               <a:rPr lang="zh-TW" altLang="en-US" dirty="0"/>
-              <a:t>組策略預留四組使用者定義策略</a:t>
+              <a:t>組策略，另預留4組自訂範本</a:t>
             </a:r>
             <a:endParaRPr lang="en-US" altLang="zh-TW" dirty="0"/>
           </a:p>
